--- a/classes/parte-3-hacking-etico-y-pentesting-metodologia/070-enumeracion-smb-snmp-smtp-y-ldap/clase-070-presentacion.pptx
+++ b/classes/parte-3-hacking-etico-y-pentesting-metodologia/070-enumeracion-smb-snmp-smtp-y-ldap/clase-070-presentacion.pptx
@@ -17,6 +17,9 @@
     <p:sldId id="265" r:id="rId16"/>
     <p:sldId id="266" r:id="rId17"/>
     <p:sldId id="267" r:id="rId18"/>
+    <p:sldId id="268" r:id="rId19"/>
+    <p:sldId id="269" r:id="rId20"/>
+    <p:sldId id="270" r:id="rId21"/>
   </p:sldIdLst>
   <p:sldSz cx="9144000" cy="6858000" type="screen4x3"/>
   <p:notesSz cx="6858000" cy="9144000"/>
@@ -3198,7 +3201,7 @@
                   <a:srgbClr val="0B3D2E"/>
                 </a:solidFill>
               </a:rPr>
-              <a:t>⚠️ Errores comunes</a:t>
+              <a:t>✍️ Ejercicios</a:t>
             </a:r>
           </a:p>
         </p:txBody>
@@ -3236,67 +3239,82 @@
                   <a:srgbClr val="22282E"/>
                 </a:solidFill>
               </a:rPr>
-              <a:t>•  enum4linux sin usuarios — Sesiones nulas deshabilitadas; prueba con credenciales de bajo privilegio</a:t>
-            </a:r>
-          </a:p>
-          <a:p>
-            <a:pPr>
-              <a:spcAft>
-                <a:spcPts val="600"/>
-              </a:spcAft>
-            </a:pPr>
-            <a:r>
-              <a:rPr sz="1500">
-                <a:solidFill>
-                  <a:srgbClr val="22282E"/>
-                </a:solidFill>
-              </a:rPr>
-              <a:t>•  snmpwalk "Timeout" — Comunidad incorrecta o puerto filtrado; prueba private o -v1</a:t>
-            </a:r>
-          </a:p>
-          <a:p>
-            <a:pPr>
-              <a:spcAft>
-                <a:spcPts val="600"/>
-              </a:spcAft>
-            </a:pPr>
-            <a:r>
-              <a:rPr sz="1500">
-                <a:solidFill>
-                  <a:srgbClr val="22282E"/>
-                </a:solidFill>
-              </a:rPr>
-              <a:t>•  SMTP no responde a VRFY — El servidor lo deshabilitó; usa RCPT TO como alternativa</a:t>
-            </a:r>
-          </a:p>
-          <a:p>
-            <a:pPr>
-              <a:spcAft>
-                <a:spcPts val="600"/>
-              </a:spcAft>
-            </a:pPr>
-            <a:r>
-              <a:rPr sz="1500">
-                <a:solidFill>
-                  <a:srgbClr val="22282E"/>
-                </a:solidFill>
-              </a:rPr>
-              <a:t>•  ldapsearch "Operations error" — Falta base DN; especifica -b con el dominio correcto</a:t>
-            </a:r>
-          </a:p>
-          <a:p>
-            <a:pPr>
-              <a:spcAft>
-                <a:spcPts val="600"/>
-              </a:spcAft>
-            </a:pPr>
-            <a:r>
-              <a:rPr sz="1500">
-                <a:solidFill>
-                  <a:srgbClr val="22282E"/>
-                </a:solidFill>
-              </a:rPr>
-              <a:t>•  MIBs numéricas ilegibles — Instala snmp-mibs-downloader y descomenta mibs en snmp.conf</a:t>
+              <a:t>•  Lista todos los shares de tu objetivo e identifica cuáles permiten lectura anónima.</a:t>
+            </a:r>
+          </a:p>
+          <a:p>
+            <a:pPr>
+              <a:spcAft>
+                <a:spcPts val="600"/>
+              </a:spcAft>
+            </a:pPr>
+            <a:r>
+              <a:rPr sz="1500">
+                <a:solidFill>
+                  <a:srgbClr val="22282E"/>
+                </a:solidFill>
+              </a:rPr>
+              <a:t>•  Extrae de SNMP la lista de procesos en ejecución del objetivo.</a:t>
+            </a:r>
+          </a:p>
+          <a:p>
+            <a:pPr>
+              <a:spcAft>
+                <a:spcPts val="600"/>
+              </a:spcAft>
+            </a:pPr>
+            <a:r>
+              <a:rPr sz="1500">
+                <a:solidFill>
+                  <a:srgbClr val="22282E"/>
+                </a:solidFill>
+              </a:rPr>
+              <a:t>•  Enumera tres usuarios válidos por SMTP y explica qué comando los reveló.</a:t>
+            </a:r>
+          </a:p>
+          <a:p>
+            <a:pPr>
+              <a:spcAft>
+                <a:spcPts val="600"/>
+              </a:spcAft>
+            </a:pPr>
+            <a:r>
+              <a:rPr sz="1500">
+                <a:solidFill>
+                  <a:srgbClr val="22282E"/>
+                </a:solidFill>
+              </a:rPr>
+              <a:t>•  Consulta por LDAP la unidad organizativa (OU) de usuarios.</a:t>
+            </a:r>
+          </a:p>
+          <a:p>
+            <a:pPr>
+              <a:spcAft>
+                <a:spcPts val="600"/>
+              </a:spcAft>
+            </a:pPr>
+            <a:r>
+              <a:rPr sz="1500">
+                <a:solidFill>
+                  <a:srgbClr val="22282E"/>
+                </a:solidFill>
+              </a:rPr>
+              <a:t>•  Correlaciona un usuario SMB con un buzón SMTP: ¿coinciden los nombres?</a:t>
+            </a:r>
+          </a:p>
+          <a:p>
+            <a:pPr>
+              <a:spcAft>
+                <a:spcPts val="600"/>
+              </a:spcAft>
+            </a:pPr>
+            <a:r>
+              <a:rPr sz="1500">
+                <a:solidFill>
+                  <a:srgbClr val="22282E"/>
+                </a:solidFill>
+              </a:rPr>
+              <a:t>•  Documenta qué harías con un share de lectura que contenga un script con credenciales.</a:t>
             </a:r>
           </a:p>
         </p:txBody>
@@ -3347,7 +3365,7 @@
                   <a:srgbClr val="0B3D2E"/>
                 </a:solidFill>
               </a:rPr>
-              <a:t>❓ Preguntas frecuentes</a:t>
+              <a:t>📝 Reto verificable</a:t>
             </a:r>
           </a:p>
         </p:txBody>
@@ -3385,97 +3403,22 @@
                   <a:srgbClr val="22282E"/>
                 </a:solidFill>
               </a:rPr>
-              <a:t>•  ❓ ¿Por qué SMB es tan valioso en un pentest?</a:t>
-            </a:r>
-          </a:p>
-          <a:p>
-            <a:pPr>
-              <a:spcAft>
-                <a:spcPts val="600"/>
-              </a:spcAft>
-            </a:pPr>
-            <a:r>
-              <a:rPr sz="1500">
-                <a:solidFill>
-                  <a:srgbClr val="22282E"/>
-                </a:solidFill>
-              </a:rPr>
-              <a:t>•  Porque concentra archivos, usuarios y, a menudo, credenciales en scripts o configuraciones. Además, es la puerta a ataques de AD como Pass-the-Hash o relay.</a:t>
-            </a:r>
-          </a:p>
-          <a:p>
-            <a:pPr>
-              <a:spcAft>
-                <a:spcPts val="600"/>
-              </a:spcAft>
-            </a:pPr>
-            <a:r>
-              <a:rPr sz="1500">
-                <a:solidFill>
-                  <a:srgbClr val="22282E"/>
-                </a:solidFill>
-              </a:rPr>
-              <a:t>•  ❓ ¿SNMP sigue siendo relevante hoy?</a:t>
-            </a:r>
-          </a:p>
-          <a:p>
-            <a:pPr>
-              <a:spcAft>
-                <a:spcPts val="600"/>
-              </a:spcAft>
-            </a:pPr>
-            <a:r>
-              <a:rPr sz="1500">
-                <a:solidFill>
-                  <a:srgbClr val="22282E"/>
-                </a:solidFill>
-              </a:rPr>
-              <a:t>•  Sí, sobre todo en impresoras, routers y switches donde public nunca se cambió. SNMPv3 con autenticación es lo recomendable, pero muchos equipos siguen en v1/v2c.</a:t>
-            </a:r>
-          </a:p>
-          <a:p>
-            <a:pPr>
-              <a:spcAft>
-                <a:spcPts val="600"/>
-              </a:spcAft>
-            </a:pPr>
-            <a:r>
-              <a:rPr sz="1500">
-                <a:solidFill>
-                  <a:srgbClr val="22282E"/>
-                </a:solidFill>
-              </a:rPr>
-              <a:t>•  ❓ ¿La enumeración SMTP funciona siempre?</a:t>
-            </a:r>
-          </a:p>
-          <a:p>
-            <a:pPr>
-              <a:spcAft>
-                <a:spcPts val="600"/>
-              </a:spcAft>
-            </a:pPr>
-            <a:r>
-              <a:rPr sz="1500">
-                <a:solidFill>
-                  <a:srgbClr val="22282E"/>
-                </a:solidFill>
-              </a:rPr>
-              <a:t>•  No. Muchos servidores modernos deshabilitan VRFY y devuelven la misma respuesta para usuarios válidos e inválidos, frustrando la enumeración.</a:t>
-            </a:r>
-          </a:p>
-          <a:p>
-            <a:pPr>
-              <a:spcAft>
-                <a:spcPts val="600"/>
-              </a:spcAft>
-            </a:pPr>
-            <a:r>
-              <a:rPr sz="1500">
-                <a:solidFill>
-                  <a:srgbClr val="22282E"/>
-                </a:solidFill>
-              </a:rPr>
-              <a:t>•  ❓ ¿Qué hago si LDAP permite bind anónimo?</a:t>
+              <a:t>•  Genera un dossier de enumeración del objetivo: lista de shares con permisos, al menos cinco usuarios, datos SNMP relevantes (SO, procesos o interfaces) y estructura LDAP si aplica.</a:t>
+            </a:r>
+          </a:p>
+          <a:p>
+            <a:pPr>
+              <a:spcAft>
+                <a:spcPts val="600"/>
+              </a:spcAft>
+            </a:pPr>
+            <a:r>
+              <a:rPr sz="1500">
+                <a:solidFill>
+                  <a:srgbClr val="22282E"/>
+                </a:solidFill>
+              </a:rPr>
+              <a:t>•  Criterio de aceptación: el dossier contiene ≥5 usuarios enumerados con la técnica que los reveló, al menos un share accesible identificado y un dato SNMP concreto (versión de SO o proceso), todo con…</a:t>
             </a:r>
           </a:p>
         </p:txBody>
@@ -3526,7 +3469,7 @@
                   <a:srgbClr val="0B3D2E"/>
                 </a:solidFill>
               </a:rPr>
-              <a:t>🔗 Referencias</a:t>
+              <a:t>⚠️ Errores comunes</a:t>
             </a:r>
           </a:p>
         </p:txBody>
@@ -3564,6 +3507,334 @@
                   <a:srgbClr val="22282E"/>
                 </a:solidFill>
               </a:rPr>
+              <a:t>•  enum4linux sin usuarios — Sesiones nulas deshabilitadas; prueba con credenciales de bajo privilegio</a:t>
+            </a:r>
+          </a:p>
+          <a:p>
+            <a:pPr>
+              <a:spcAft>
+                <a:spcPts val="600"/>
+              </a:spcAft>
+            </a:pPr>
+            <a:r>
+              <a:rPr sz="1500">
+                <a:solidFill>
+                  <a:srgbClr val="22282E"/>
+                </a:solidFill>
+              </a:rPr>
+              <a:t>•  snmpwalk "Timeout" — Comunidad incorrecta o puerto filtrado; prueba private o -v1</a:t>
+            </a:r>
+          </a:p>
+          <a:p>
+            <a:pPr>
+              <a:spcAft>
+                <a:spcPts val="600"/>
+              </a:spcAft>
+            </a:pPr>
+            <a:r>
+              <a:rPr sz="1500">
+                <a:solidFill>
+                  <a:srgbClr val="22282E"/>
+                </a:solidFill>
+              </a:rPr>
+              <a:t>•  SMTP no responde a VRFY — El servidor lo deshabilitó; usa RCPT TO como alternativa</a:t>
+            </a:r>
+          </a:p>
+          <a:p>
+            <a:pPr>
+              <a:spcAft>
+                <a:spcPts val="600"/>
+              </a:spcAft>
+            </a:pPr>
+            <a:r>
+              <a:rPr sz="1500">
+                <a:solidFill>
+                  <a:srgbClr val="22282E"/>
+                </a:solidFill>
+              </a:rPr>
+              <a:t>•  ldapsearch "Operations error" — Falta base DN; especifica -b con el dominio correcto</a:t>
+            </a:r>
+          </a:p>
+          <a:p>
+            <a:pPr>
+              <a:spcAft>
+                <a:spcPts val="600"/>
+              </a:spcAft>
+            </a:pPr>
+            <a:r>
+              <a:rPr sz="1500">
+                <a:solidFill>
+                  <a:srgbClr val="22282E"/>
+                </a:solidFill>
+              </a:rPr>
+              <a:t>•  MIBs numéricas ilegibles — Instala snmp-mibs-downloader y descomenta mibs en snmp.conf</a:t>
+            </a:r>
+          </a:p>
+        </p:txBody>
+      </p:sp>
+    </p:spTree>
+  </p:cSld>
+  <p:clrMapOvr>
+    <a:masterClrMapping/>
+  </p:clrMapOvr>
+</p:sld>
+</file>
+
+<file path=ppt/slides/slide13.xml><?xml version="1.0" encoding="utf-8"?>
+<p:sld xmlns:a="http://schemas.openxmlformats.org/drawingml/2006/main" xmlns:p="http://schemas.openxmlformats.org/presentationml/2006/main" xmlns:r="http://schemas.openxmlformats.org/officeDocument/2006/relationships">
+  <p:cSld>
+    <p:spTree>
+      <p:nvGrpSpPr>
+        <p:cNvPr id="1" name=""/>
+        <p:cNvGrpSpPr/>
+        <p:nvPr/>
+      </p:nvGrpSpPr>
+      <p:grpSpPr/>
+      <p:sp>
+        <p:nvSpPr>
+          <p:cNvPr id="2" name="TextBox 1"/>
+          <p:cNvSpPr txBox="1"/>
+          <p:nvPr/>
+        </p:nvSpPr>
+        <p:spPr>
+          <a:xfrm>
+            <a:off x="457200" y="320040"/>
+            <a:ext cx="8229600" cy="822960"/>
+          </a:xfrm>
+          <a:prstGeom prst="rect">
+            <a:avLst/>
+          </a:prstGeom>
+          <a:noFill/>
+        </p:spPr>
+        <p:txBody>
+          <a:bodyPr wrap="square">
+            <a:spAutoFit/>
+          </a:bodyPr>
+          <a:lstStyle/>
+          <a:p>
+            <a:r>
+              <a:rPr sz="2600" b="1">
+                <a:solidFill>
+                  <a:srgbClr val="0B3D2E"/>
+                </a:solidFill>
+              </a:rPr>
+              <a:t>❓ Preguntas frecuentes</a:t>
+            </a:r>
+          </a:p>
+        </p:txBody>
+      </p:sp>
+      <p:sp>
+        <p:nvSpPr>
+          <p:cNvPr id="3" name="TextBox 2"/>
+          <p:cNvSpPr txBox="1"/>
+          <p:nvPr/>
+        </p:nvSpPr>
+        <p:spPr>
+          <a:xfrm>
+            <a:off x="457200" y="1280160"/>
+            <a:ext cx="8229600" cy="4937760"/>
+          </a:xfrm>
+          <a:prstGeom prst="rect">
+            <a:avLst/>
+          </a:prstGeom>
+          <a:noFill/>
+        </p:spPr>
+        <p:txBody>
+          <a:bodyPr wrap="square">
+            <a:spAutoFit/>
+          </a:bodyPr>
+          <a:lstStyle/>
+          <a:p>
+            <a:pPr>
+              <a:spcAft>
+                <a:spcPts val="600"/>
+              </a:spcAft>
+            </a:pPr>
+            <a:r>
+              <a:rPr sz="1500">
+                <a:solidFill>
+                  <a:srgbClr val="22282E"/>
+                </a:solidFill>
+              </a:rPr>
+              <a:t>•  ❓ ¿Por qué SMB es tan valioso en un pentest?</a:t>
+            </a:r>
+          </a:p>
+          <a:p>
+            <a:pPr>
+              <a:spcAft>
+                <a:spcPts val="600"/>
+              </a:spcAft>
+            </a:pPr>
+            <a:r>
+              <a:rPr sz="1500">
+                <a:solidFill>
+                  <a:srgbClr val="22282E"/>
+                </a:solidFill>
+              </a:rPr>
+              <a:t>•  Porque concentra archivos, usuarios y, a menudo, credenciales en scripts o configuraciones. Además, es la puerta a ataques de AD como Pass-the-Hash o relay.</a:t>
+            </a:r>
+          </a:p>
+          <a:p>
+            <a:pPr>
+              <a:spcAft>
+                <a:spcPts val="600"/>
+              </a:spcAft>
+            </a:pPr>
+            <a:r>
+              <a:rPr sz="1500">
+                <a:solidFill>
+                  <a:srgbClr val="22282E"/>
+                </a:solidFill>
+              </a:rPr>
+              <a:t>•  ❓ ¿SNMP sigue siendo relevante hoy?</a:t>
+            </a:r>
+          </a:p>
+          <a:p>
+            <a:pPr>
+              <a:spcAft>
+                <a:spcPts val="600"/>
+              </a:spcAft>
+            </a:pPr>
+            <a:r>
+              <a:rPr sz="1500">
+                <a:solidFill>
+                  <a:srgbClr val="22282E"/>
+                </a:solidFill>
+              </a:rPr>
+              <a:t>•  Sí, sobre todo en impresoras, routers y switches donde public nunca se cambió. SNMPv3 con autenticación es lo recomendable, pero muchos equipos siguen en v1/v2c.</a:t>
+            </a:r>
+          </a:p>
+          <a:p>
+            <a:pPr>
+              <a:spcAft>
+                <a:spcPts val="600"/>
+              </a:spcAft>
+            </a:pPr>
+            <a:r>
+              <a:rPr sz="1500">
+                <a:solidFill>
+                  <a:srgbClr val="22282E"/>
+                </a:solidFill>
+              </a:rPr>
+              <a:t>•  ❓ ¿La enumeración SMTP funciona siempre?</a:t>
+            </a:r>
+          </a:p>
+          <a:p>
+            <a:pPr>
+              <a:spcAft>
+                <a:spcPts val="600"/>
+              </a:spcAft>
+            </a:pPr>
+            <a:r>
+              <a:rPr sz="1500">
+                <a:solidFill>
+                  <a:srgbClr val="22282E"/>
+                </a:solidFill>
+              </a:rPr>
+              <a:t>•  No. Muchos servidores modernos deshabilitan VRFY y devuelven la misma respuesta para usuarios válidos e inválidos, frustrando la enumeración.</a:t>
+            </a:r>
+          </a:p>
+          <a:p>
+            <a:pPr>
+              <a:spcAft>
+                <a:spcPts val="600"/>
+              </a:spcAft>
+            </a:pPr>
+            <a:r>
+              <a:rPr sz="1500">
+                <a:solidFill>
+                  <a:srgbClr val="22282E"/>
+                </a:solidFill>
+              </a:rPr>
+              <a:t>•  ❓ ¿Qué hago si LDAP permite bind anónimo?</a:t>
+            </a:r>
+          </a:p>
+        </p:txBody>
+      </p:sp>
+    </p:spTree>
+  </p:cSld>
+  <p:clrMapOvr>
+    <a:masterClrMapping/>
+  </p:clrMapOvr>
+</p:sld>
+</file>
+
+<file path=ppt/slides/slide14.xml><?xml version="1.0" encoding="utf-8"?>
+<p:sld xmlns:a="http://schemas.openxmlformats.org/drawingml/2006/main" xmlns:p="http://schemas.openxmlformats.org/presentationml/2006/main" xmlns:r="http://schemas.openxmlformats.org/officeDocument/2006/relationships">
+  <p:cSld>
+    <p:spTree>
+      <p:nvGrpSpPr>
+        <p:cNvPr id="1" name=""/>
+        <p:cNvGrpSpPr/>
+        <p:nvPr/>
+      </p:nvGrpSpPr>
+      <p:grpSpPr/>
+      <p:sp>
+        <p:nvSpPr>
+          <p:cNvPr id="2" name="TextBox 1"/>
+          <p:cNvSpPr txBox="1"/>
+          <p:nvPr/>
+        </p:nvSpPr>
+        <p:spPr>
+          <a:xfrm>
+            <a:off x="457200" y="320040"/>
+            <a:ext cx="8229600" cy="822960"/>
+          </a:xfrm>
+          <a:prstGeom prst="rect">
+            <a:avLst/>
+          </a:prstGeom>
+          <a:noFill/>
+        </p:spPr>
+        <p:txBody>
+          <a:bodyPr wrap="square">
+            <a:spAutoFit/>
+          </a:bodyPr>
+          <a:lstStyle/>
+          <a:p>
+            <a:r>
+              <a:rPr sz="2600" b="1">
+                <a:solidFill>
+                  <a:srgbClr val="0B3D2E"/>
+                </a:solidFill>
+              </a:rPr>
+              <a:t>🔗 Referencias</a:t>
+            </a:r>
+          </a:p>
+        </p:txBody>
+      </p:sp>
+      <p:sp>
+        <p:nvSpPr>
+          <p:cNvPr id="3" name="TextBox 2"/>
+          <p:cNvSpPr txBox="1"/>
+          <p:nvPr/>
+        </p:nvSpPr>
+        <p:spPr>
+          <a:xfrm>
+            <a:off x="457200" y="1280160"/>
+            <a:ext cx="8229600" cy="4937760"/>
+          </a:xfrm>
+          <a:prstGeom prst="rect">
+            <a:avLst/>
+          </a:prstGeom>
+          <a:noFill/>
+        </p:spPr>
+        <p:txBody>
+          <a:bodyPr wrap="square">
+            <a:spAutoFit/>
+          </a:bodyPr>
+          <a:lstStyle/>
+          <a:p>
+            <a:pPr>
+              <a:spcAft>
+                <a:spcPts val="600"/>
+              </a:spcAft>
+            </a:pPr>
+            <a:r>
+              <a:rPr sz="1500">
+                <a:solidFill>
+                  <a:srgbClr val="22282E"/>
+                </a:solidFill>
+              </a:rPr>
               <a:t>•  Kim, P. The Hacker Playbook 3 (2018).</a:t>
             </a:r>
           </a:p>
@@ -3614,6 +3885,81 @@
           </a:p>
         </p:txBody>
       </p:sp>
+    </p:spTree>
+  </p:cSld>
+  <p:clrMapOvr>
+    <a:masterClrMapping/>
+  </p:clrMapOvr>
+</p:sld>
+</file>
+
+<file path=ppt/slides/slide15.xml><?xml version="1.0" encoding="utf-8"?>
+<p:sld xmlns:a="http://schemas.openxmlformats.org/drawingml/2006/main" xmlns:p="http://schemas.openxmlformats.org/presentationml/2006/main" xmlns:r="http://schemas.openxmlformats.org/officeDocument/2006/relationships">
+  <p:cSld>
+    <p:spTree>
+      <p:nvGrpSpPr>
+        <p:cNvPr id="1" name=""/>
+        <p:cNvGrpSpPr/>
+        <p:nvPr/>
+      </p:nvGrpSpPr>
+      <p:grpSpPr/>
+      <p:sp>
+        <p:nvSpPr>
+          <p:cNvPr id="2" name="TextBox 1"/>
+          <p:cNvSpPr txBox="1"/>
+          <p:nvPr/>
+        </p:nvSpPr>
+        <p:spPr>
+          <a:xfrm>
+            <a:off x="457200" y="274320"/>
+            <a:ext cx="8229600" cy="640080"/>
+          </a:xfrm>
+          <a:prstGeom prst="rect">
+            <a:avLst/>
+          </a:prstGeom>
+          <a:noFill/>
+        </p:spPr>
+        <p:txBody>
+          <a:bodyPr wrap="square">
+            <a:spAutoFit/>
+          </a:bodyPr>
+          <a:lstStyle/>
+          <a:p>
+            <a:r>
+              <a:rPr sz="2200" b="1">
+                <a:solidFill>
+                  <a:srgbClr val="0B3D2E"/>
+                </a:solidFill>
+              </a:rPr>
+              <a:t>Diagrama de la clase</a:t>
+            </a:r>
+          </a:p>
+        </p:txBody>
+      </p:sp>
+      <p:pic>
+        <p:nvPicPr>
+          <p:cNvPr id="3" name="Picture 2" descr="d5e4449ec220d987.png"/>
+          <p:cNvPicPr>
+            <a:picLocks noChangeAspect="1"/>
+          </p:cNvPicPr>
+          <p:nvPr/>
+        </p:nvPicPr>
+        <p:blipFill>
+          <a:blip r:embed="rId2"/>
+          <a:stretch>
+            <a:fillRect/>
+          </a:stretch>
+        </p:blipFill>
+        <p:spPr>
+          <a:xfrm>
+            <a:off x="457200" y="2226564"/>
+            <a:ext cx="8229600" cy="3044952"/>
+          </a:xfrm>
+          <a:prstGeom prst="rect">
+            <a:avLst/>
+          </a:prstGeom>
+        </p:spPr>
+      </p:pic>
     </p:spTree>
   </p:cSld>
   <p:clrMapOvr>
@@ -3698,7 +4044,7 @@
                   <a:srgbClr val="22282E"/>
                 </a:solidFill>
               </a:rPr>
-              <a:t>•  Extraer información detallada de los servicios más jugosos de una red corporativa: recursos compartidos y usuarios por SMB, dispositivos y comunidades por SNMP, cuentas válidas por SMTP y estructura del directorio por LDAP. La enumeración convierte "hay un puerto 445 abierto" en "hay estos usuarios y estos shares".</a:t>
+              <a:t>•  Extraer información detallada de los servicios más jugosos de una red corporativa: recursos compartidos y usuarios por SMB, dispositivos y comunidades por SNMP, cuentas válidas por SMTP y estructura…</a:t>
             </a:r>
           </a:p>
         </p:txBody>
@@ -4092,7 +4438,7 @@
                   <a:srgbClr val="0B3D2E"/>
                 </a:solidFill>
               </a:rPr>
-              <a:t>📖 Definiciones y características</a:t>
+              <a:t>🧠 Explicación en profundidad</a:t>
             </a:r>
           </a:p>
         </p:txBody>
@@ -4130,82 +4476,97 @@
                   <a:srgbClr val="22282E"/>
                 </a:solidFill>
               </a:rPr>
-              <a:t>•  SMB (Server Message Block): protocolo de compartición de archivos de Windows. Característica clave: las sesiones nulas pueden listar shares y usuarios sin credenciales.</a:t>
-            </a:r>
-          </a:p>
-          <a:p>
-            <a:pPr>
-              <a:spcAft>
-                <a:spcPts val="600"/>
-              </a:spcAft>
-            </a:pPr>
-            <a:r>
-              <a:rPr sz="1500">
-                <a:solidFill>
-                  <a:srgbClr val="22282E"/>
-                </a:solidFill>
-              </a:rPr>
-              <a:t>•  Sesión nula: conexión SMB anónima. Característica clave: en sistemas antiguos revela usuarios, grupos y políticas.</a:t>
-            </a:r>
-          </a:p>
-          <a:p>
-            <a:pPr>
-              <a:spcAft>
-                <a:spcPts val="600"/>
-              </a:spcAft>
-            </a:pPr>
-            <a:r>
-              <a:rPr sz="1500">
-                <a:solidFill>
-                  <a:srgbClr val="22282E"/>
-                </a:solidFill>
-              </a:rPr>
-              <a:t>•  SNMP (Simple Network Management Protocol): gestión de dispositivos vía UDP/161. Característica clave: las comunidades public/private suelen quedar por defecto y exponen la MIB completa.</a:t>
-            </a:r>
-          </a:p>
-          <a:p>
-            <a:pPr>
-              <a:spcAft>
-                <a:spcPts val="600"/>
-              </a:spcAft>
-            </a:pPr>
-            <a:r>
-              <a:rPr sz="1500">
-                <a:solidFill>
-                  <a:srgbClr val="22282E"/>
-                </a:solidFill>
-              </a:rPr>
-              <a:t>•  SMTP VRFY/RCPT: comandos que verifican existencia de buzones. Característica clave: permiten enumerar usuarios válidos si el servidor no lo bloquea.</a:t>
-            </a:r>
-          </a:p>
-          <a:p>
-            <a:pPr>
-              <a:spcAft>
-                <a:spcPts val="600"/>
-              </a:spcAft>
-            </a:pPr>
-            <a:r>
-              <a:rPr sz="1500">
-                <a:solidFill>
-                  <a:srgbClr val="22282E"/>
-                </a:solidFill>
-              </a:rPr>
-              <a:t>•  LDAP anónimo: consulta al directorio sin autenticación. Característica clave: puede revelar OUs, usuarios y atributos de Active Directory.</a:t>
-            </a:r>
-          </a:p>
-          <a:p>
-            <a:pPr>
-              <a:spcAft>
-                <a:spcPts val="600"/>
-              </a:spcAft>
-            </a:pPr>
-            <a:r>
-              <a:rPr sz="1500">
-                <a:solidFill>
-                  <a:srgbClr val="22282E"/>
-                </a:solidFill>
-              </a:rPr>
-              <a:t>•  CrackMapExec: navaja suiza para redes Windows/AD. Característica clave: enumera y valida credenciales SMB/LDAP a escala.</a:t>
+              <a:t>•  El escaneo dice qué servicios hay; la enumeración interroga a cada uno para sacarle</a:t>
+            </a:r>
+          </a:p>
+          <a:p>
+            <a:pPr>
+              <a:spcAft>
+                <a:spcPts val="600"/>
+              </a:spcAft>
+            </a:pPr>
+            <a:r>
+              <a:rPr sz="1500">
+                <a:solidFill>
+                  <a:srgbClr val="22282E"/>
+                </a:solidFill>
+              </a:rPr>
+              <a:t>•  todo lo que revela sin autenticación o con credenciales mínimas. Es la fase que más</a:t>
+            </a:r>
+          </a:p>
+          <a:p>
+            <a:pPr>
+              <a:spcAft>
+                <a:spcPts val="600"/>
+              </a:spcAft>
+            </a:pPr>
+            <a:r>
+              <a:rPr sz="1500">
+                <a:solidFill>
+                  <a:srgbClr val="22282E"/>
+                </a:solidFill>
+              </a:rPr>
+              <a:t>•  determina el resultado de un pentest y la que peor se hace por prisa, porque su valor no</a:t>
+            </a:r>
+          </a:p>
+          <a:p>
+            <a:pPr>
+              <a:spcAft>
+                <a:spcPts val="600"/>
+              </a:spcAft>
+            </a:pPr>
+            <a:r>
+              <a:rPr sz="1500">
+                <a:solidFill>
+                  <a:srgbClr val="22282E"/>
+                </a:solidFill>
+              </a:rPr>
+              <a:t>•  está en una herramienta espectacular sino en la disciplina de preguntarle a cada servicio</a:t>
+            </a:r>
+          </a:p>
+          <a:p>
+            <a:pPr>
+              <a:spcAft>
+                <a:spcPts val="600"/>
+              </a:spcAft>
+            </a:pPr>
+            <a:r>
+              <a:rPr sz="1500">
+                <a:solidFill>
+                  <a:srgbClr val="22282E"/>
+                </a:solidFill>
+              </a:rPr>
+              <a:t>•  exactamente lo que ese servicio suele filtrar. Cuatro protocolos concentran la mayor parte</a:t>
+            </a:r>
+          </a:p>
+          <a:p>
+            <a:pPr>
+              <a:spcAft>
+                <a:spcPts val="600"/>
+              </a:spcAft>
+            </a:pPr>
+            <a:r>
+              <a:rPr sz="1500">
+                <a:solidFill>
+                  <a:srgbClr val="22282E"/>
+                </a:solidFill>
+              </a:rPr>
+              <a:t>•  del botín en una red típica, y cada uno tiene su repertorio.</a:t>
+            </a:r>
+          </a:p>
+          <a:p>
+            <a:pPr>
+              <a:spcAft>
+                <a:spcPts val="600"/>
+              </a:spcAft>
+            </a:pPr>
+            <a:r>
+              <a:rPr sz="1500">
+                <a:solidFill>
+                  <a:srgbClr val="22282E"/>
+                </a:solidFill>
+              </a:rPr>
+              <a:t>•  SMB (puertos 139/445) es la joya de la enumeración en entornos Windows porque</a:t>
             </a:r>
           </a:p>
         </p:txBody>
@@ -4256,7 +4617,7 @@
                   <a:srgbClr val="0B3D2E"/>
                 </a:solidFill>
               </a:rPr>
-              <a:t>🧰 Herramientas y preparación</a:t>
+              <a:t>📖 Definiciones y características</a:t>
             </a:r>
           </a:p>
         </p:txBody>
@@ -4294,22 +4655,82 @@
                   <a:srgbClr val="22282E"/>
                 </a:solidFill>
               </a:rPr>
-              <a:t>•  sudo apt install -y enum4linux smbclient snmp snmp-mibs-downloader ldap-utils crackmapexec</a:t>
-            </a:r>
-          </a:p>
-          <a:p>
-            <a:pPr>
-              <a:spcAft>
-                <a:spcPts val="600"/>
-              </a:spcAft>
-            </a:pPr>
-            <a:r>
-              <a:rPr sz="1500">
-                <a:solidFill>
-                  <a:srgbClr val="22282E"/>
-                </a:solidFill>
-              </a:rPr>
-              <a:t>•  Objetivo: Metasploitable o un Windows/AD de laboratorio propio en red aislada.</a:t>
+              <a:t>•  SMB (Server Message Block): protocolo de compartición de archivos de Windows. Característica clave: las sesiones nulas pueden listar shares y usuarios sin credenciales.</a:t>
+            </a:r>
+          </a:p>
+          <a:p>
+            <a:pPr>
+              <a:spcAft>
+                <a:spcPts val="600"/>
+              </a:spcAft>
+            </a:pPr>
+            <a:r>
+              <a:rPr sz="1500">
+                <a:solidFill>
+                  <a:srgbClr val="22282E"/>
+                </a:solidFill>
+              </a:rPr>
+              <a:t>•  Sesión nula: conexión SMB anónima. Característica clave: en sistemas antiguos revela usuarios, grupos y políticas.</a:t>
+            </a:r>
+          </a:p>
+          <a:p>
+            <a:pPr>
+              <a:spcAft>
+                <a:spcPts val="600"/>
+              </a:spcAft>
+            </a:pPr>
+            <a:r>
+              <a:rPr sz="1500">
+                <a:solidFill>
+                  <a:srgbClr val="22282E"/>
+                </a:solidFill>
+              </a:rPr>
+              <a:t>•  SNMP (Simple Network Management Protocol): gestión de dispositivos vía UDP/161. Característica clave: las comunidades public/private suelen quedar por defecto y exponen la MIB completa.</a:t>
+            </a:r>
+          </a:p>
+          <a:p>
+            <a:pPr>
+              <a:spcAft>
+                <a:spcPts val="600"/>
+              </a:spcAft>
+            </a:pPr>
+            <a:r>
+              <a:rPr sz="1500">
+                <a:solidFill>
+                  <a:srgbClr val="22282E"/>
+                </a:solidFill>
+              </a:rPr>
+              <a:t>•  SMTP VRFY/RCPT: comandos que verifican existencia de buzones. Característica clave: permiten enumerar usuarios válidos si el servidor no lo bloquea.</a:t>
+            </a:r>
+          </a:p>
+          <a:p>
+            <a:pPr>
+              <a:spcAft>
+                <a:spcPts val="600"/>
+              </a:spcAft>
+            </a:pPr>
+            <a:r>
+              <a:rPr sz="1500">
+                <a:solidFill>
+                  <a:srgbClr val="22282E"/>
+                </a:solidFill>
+              </a:rPr>
+              <a:t>•  LDAP anónimo: consulta al directorio sin autenticación. Característica clave: puede revelar OUs, usuarios y atributos de Active Directory.</a:t>
+            </a:r>
+          </a:p>
+          <a:p>
+            <a:pPr>
+              <a:spcAft>
+                <a:spcPts val="600"/>
+              </a:spcAft>
+            </a:pPr>
+            <a:r>
+              <a:rPr sz="1500">
+                <a:solidFill>
+                  <a:srgbClr val="22282E"/>
+                </a:solidFill>
+              </a:rPr>
+              <a:t>•  CrackMapExec: navaja suiza para redes Windows/AD. Característica clave: enumera y valida credenciales SMB/LDAP a escala.</a:t>
             </a:r>
           </a:p>
         </p:txBody>
@@ -4360,7 +4781,7 @@
                   <a:srgbClr val="0B3D2E"/>
                 </a:solidFill>
               </a:rPr>
-              <a:t>🧪 Laboratorio guiado</a:t>
+              <a:t>📔 Glosario</a:t>
             </a:r>
           </a:p>
         </p:txBody>
@@ -4398,97 +4819,97 @@
                   <a:srgbClr val="22282E"/>
                 </a:solidFill>
               </a:rPr>
-              <a:t>•  Sustituye TARGET por la IP de tu objetivo de laboratorio.</a:t>
-            </a:r>
-          </a:p>
-          <a:p>
-            <a:pPr>
-              <a:spcAft>
-                <a:spcPts val="600"/>
-              </a:spcAft>
-            </a:pPr>
-            <a:r>
-              <a:rPr sz="1500">
-                <a:solidFill>
-                  <a:srgbClr val="22282E"/>
-                </a:solidFill>
-              </a:rPr>
-              <a:t>•  Enumeración SMB integral:</a:t>
-            </a:r>
-          </a:p>
-          <a:p>
-            <a:pPr>
-              <a:spcAft>
-                <a:spcPts val="600"/>
-              </a:spcAft>
-            </a:pPr>
-            <a:r>
-              <a:rPr sz="1500">
-                <a:solidFill>
-                  <a:srgbClr val="22282E"/>
-                </a:solidFill>
-              </a:rPr>
-              <a:t>•  enum4linux -a TARGET</a:t>
-            </a:r>
-          </a:p>
-          <a:p>
-            <a:pPr>
-              <a:spcAft>
-                <a:spcPts val="600"/>
-              </a:spcAft>
-            </a:pPr>
-            <a:r>
-              <a:rPr sz="1500">
-                <a:solidFill>
-                  <a:srgbClr val="22282E"/>
-                </a:solidFill>
-              </a:rPr>
-              <a:t>•  Listar shares con smbclient (sesión nula):</a:t>
-            </a:r>
-          </a:p>
-          <a:p>
-            <a:pPr>
-              <a:spcAft>
-                <a:spcPts val="600"/>
-              </a:spcAft>
-            </a:pPr>
-            <a:r>
-              <a:rPr sz="1500">
-                <a:solidFill>
-                  <a:srgbClr val="22282E"/>
-                </a:solidFill>
-              </a:rPr>
-              <a:t>•  smbclient -L //TARGET -N</a:t>
-            </a:r>
-          </a:p>
-          <a:p>
-            <a:pPr>
-              <a:spcAft>
-                <a:spcPts val="600"/>
-              </a:spcAft>
-            </a:pPr>
-            <a:r>
-              <a:rPr sz="1500">
-                <a:solidFill>
-                  <a:srgbClr val="22282E"/>
-                </a:solidFill>
-              </a:rPr>
-              <a:t>•  Enumerar con CrackMapExec (shares y usuarios):</a:t>
-            </a:r>
-          </a:p>
-          <a:p>
-            <a:pPr>
-              <a:spcAft>
-                <a:spcPts val="600"/>
-              </a:spcAft>
-            </a:pPr>
-            <a:r>
-              <a:rPr sz="1500">
-                <a:solidFill>
-                  <a:srgbClr val="22282E"/>
-                </a:solidFill>
-              </a:rPr>
-              <a:t>•  crackmapexec smb TARGET --shares</a:t>
+              <a:t>•  Término — Definición concisa</a:t>
+            </a:r>
+          </a:p>
+          <a:p>
+            <a:pPr>
+              <a:spcAft>
+                <a:spcPts val="600"/>
+              </a:spcAft>
+            </a:pPr>
+            <a:r>
+              <a:rPr sz="1500">
+                <a:solidFill>
+                  <a:srgbClr val="22282E"/>
+                </a:solidFill>
+              </a:rPr>
+              <a:t>•  Enumeración — Interrogar cada servicio para extraer todo lo que revela</a:t>
+            </a:r>
+          </a:p>
+          <a:p>
+            <a:pPr>
+              <a:spcAft>
+                <a:spcPts val="600"/>
+              </a:spcAft>
+            </a:pPr>
+            <a:r>
+              <a:rPr sz="1500">
+                <a:solidFill>
+                  <a:srgbClr val="22282E"/>
+                </a:solidFill>
+              </a:rPr>
+              <a:t>•  SMB (139/445) — Protocolo de compartición de Windows; muy rico en datos</a:t>
+            </a:r>
+          </a:p>
+          <a:p>
+            <a:pPr>
+              <a:spcAft>
+                <a:spcPts val="600"/>
+              </a:spcAft>
+            </a:pPr>
+            <a:r>
+              <a:rPr sz="1500">
+                <a:solidFill>
+                  <a:srgbClr val="22282E"/>
+                </a:solidFill>
+              </a:rPr>
+              <a:t>•  Sesión nula — Conexión SMB sin credenciales que puede filtrar usuarios y shares</a:t>
+            </a:r>
+          </a:p>
+          <a:p>
+            <a:pPr>
+              <a:spcAft>
+                <a:spcPts val="600"/>
+              </a:spcAft>
+            </a:pPr>
+            <a:r>
+              <a:rPr sz="1500">
+                <a:solidFill>
+                  <a:srgbClr val="22282E"/>
+                </a:solidFill>
+              </a:rPr>
+              <a:t>•  Compartición (share) — Recurso publicado por SMB; puede contener secretos</a:t>
+            </a:r>
+          </a:p>
+          <a:p>
+            <a:pPr>
+              <a:spcAft>
+                <a:spcPts val="600"/>
+              </a:spcAft>
+            </a:pPr>
+            <a:r>
+              <a:rPr sz="1500">
+                <a:solidFill>
+                  <a:srgbClr val="22282E"/>
+                </a:solidFill>
+              </a:rPr>
+              <a:t>•  Política de contraseñas — Umbral de bloqueo; decide la estrategia de spraying</a:t>
+            </a:r>
+          </a:p>
+          <a:p>
+            <a:pPr>
+              <a:spcAft>
+                <a:spcPts val="600"/>
+              </a:spcAft>
+            </a:pPr>
+            <a:r>
+              <a:rPr sz="1500">
+                <a:solidFill>
+                  <a:srgbClr val="22282E"/>
+                </a:solidFill>
+              </a:rPr>
+              <a:t>•  enum4linux / smbclient — Herramientas de enumeración y navegación SMB</a:t>
             </a:r>
           </a:p>
         </p:txBody>
@@ -4539,7 +4960,7 @@
                   <a:srgbClr val="0B3D2E"/>
                 </a:solidFill>
               </a:rPr>
-              <a:t>✍️ Ejercicios</a:t>
+              <a:t>🧰 Herramientas y preparación</a:t>
             </a:r>
           </a:p>
         </p:txBody>
@@ -4577,82 +4998,7 @@
                   <a:srgbClr val="22282E"/>
                 </a:solidFill>
               </a:rPr>
-              <a:t>•  Lista todos los shares de tu objetivo e identifica cuáles permiten lectura anónima.</a:t>
-            </a:r>
-          </a:p>
-          <a:p>
-            <a:pPr>
-              <a:spcAft>
-                <a:spcPts val="600"/>
-              </a:spcAft>
-            </a:pPr>
-            <a:r>
-              <a:rPr sz="1500">
-                <a:solidFill>
-                  <a:srgbClr val="22282E"/>
-                </a:solidFill>
-              </a:rPr>
-              <a:t>•  Extrae de SNMP la lista de procesos en ejecución del objetivo.</a:t>
-            </a:r>
-          </a:p>
-          <a:p>
-            <a:pPr>
-              <a:spcAft>
-                <a:spcPts val="600"/>
-              </a:spcAft>
-            </a:pPr>
-            <a:r>
-              <a:rPr sz="1500">
-                <a:solidFill>
-                  <a:srgbClr val="22282E"/>
-                </a:solidFill>
-              </a:rPr>
-              <a:t>•  Enumera tres usuarios válidos por SMTP y explica qué comando los reveló.</a:t>
-            </a:r>
-          </a:p>
-          <a:p>
-            <a:pPr>
-              <a:spcAft>
-                <a:spcPts val="600"/>
-              </a:spcAft>
-            </a:pPr>
-            <a:r>
-              <a:rPr sz="1500">
-                <a:solidFill>
-                  <a:srgbClr val="22282E"/>
-                </a:solidFill>
-              </a:rPr>
-              <a:t>•  Consulta por LDAP la unidad organizativa (OU) de usuarios.</a:t>
-            </a:r>
-          </a:p>
-          <a:p>
-            <a:pPr>
-              <a:spcAft>
-                <a:spcPts val="600"/>
-              </a:spcAft>
-            </a:pPr>
-            <a:r>
-              <a:rPr sz="1500">
-                <a:solidFill>
-                  <a:srgbClr val="22282E"/>
-                </a:solidFill>
-              </a:rPr>
-              <a:t>•  Correlaciona un usuario SMB con un buzón SMTP: ¿coinciden los nombres?</a:t>
-            </a:r>
-          </a:p>
-          <a:p>
-            <a:pPr>
-              <a:spcAft>
-                <a:spcPts val="600"/>
-              </a:spcAft>
-            </a:pPr>
-            <a:r>
-              <a:rPr sz="1500">
-                <a:solidFill>
-                  <a:srgbClr val="22282E"/>
-                </a:solidFill>
-              </a:rPr>
-              <a:t>•  Documenta qué harías con un share de lectura que contenga un script con credenciales.</a:t>
+              <a:t>•  Objetivo: Metasploitable o un Windows/AD de laboratorio propio en red aislada.</a:t>
             </a:r>
           </a:p>
         </p:txBody>
@@ -4703,7 +5049,7 @@
                   <a:srgbClr val="0B3D2E"/>
                 </a:solidFill>
               </a:rPr>
-              <a:t>📝 Reto verificable</a:t>
+              <a:t>🧪 Laboratorio guiado</a:t>
             </a:r>
           </a:p>
         </p:txBody>
@@ -4741,22 +5087,97 @@
                   <a:srgbClr val="22282E"/>
                 </a:solidFill>
               </a:rPr>
-              <a:t>•  Genera un dossier de enumeración del objetivo: lista de shares con permisos, al menos cinco usuarios, datos SNMP relevantes (SO, procesos o interfaces) y estructura LDAP si aplica.</a:t>
-            </a:r>
-          </a:p>
-          <a:p>
-            <a:pPr>
-              <a:spcAft>
-                <a:spcPts val="600"/>
-              </a:spcAft>
-            </a:pPr>
-            <a:r>
-              <a:rPr sz="1500">
-                <a:solidFill>
-                  <a:srgbClr val="22282E"/>
-                </a:solidFill>
-              </a:rPr>
-              <a:t>•  Criterio de aceptación: el dossier contiene ≥5 usuarios enumerados con la técnica que los reveló, al menos un share accesible identificado y un dato SNMP concreto (versión de SO o proceso), todo con evidencia (comando + salida).</a:t>
+              <a:t>•  Sustituye TARGET por la IP de tu objetivo de laboratorio.</a:t>
+            </a:r>
+          </a:p>
+          <a:p>
+            <a:pPr>
+              <a:spcAft>
+                <a:spcPts val="600"/>
+              </a:spcAft>
+            </a:pPr>
+            <a:r>
+              <a:rPr sz="1500">
+                <a:solidFill>
+                  <a:srgbClr val="22282E"/>
+                </a:solidFill>
+              </a:rPr>
+              <a:t>•  Enumeración SMB integral:</a:t>
+            </a:r>
+          </a:p>
+          <a:p>
+            <a:pPr>
+              <a:spcAft>
+                <a:spcPts val="600"/>
+              </a:spcAft>
+            </a:pPr>
+            <a:r>
+              <a:rPr sz="1500">
+                <a:solidFill>
+                  <a:srgbClr val="22282E"/>
+                </a:solidFill>
+              </a:rPr>
+              <a:t>•  Listar shares con smbclient (sesión nula):</a:t>
+            </a:r>
+          </a:p>
+          <a:p>
+            <a:pPr>
+              <a:spcAft>
+                <a:spcPts val="600"/>
+              </a:spcAft>
+            </a:pPr>
+            <a:r>
+              <a:rPr sz="1500">
+                <a:solidFill>
+                  <a:srgbClr val="22282E"/>
+                </a:solidFill>
+              </a:rPr>
+              <a:t>•  Enumerar con CrackMapExec (shares y usuarios):</a:t>
+            </a:r>
+          </a:p>
+          <a:p>
+            <a:pPr>
+              <a:spcAft>
+                <a:spcPts val="600"/>
+              </a:spcAft>
+            </a:pPr>
+            <a:r>
+              <a:rPr sz="1500">
+                <a:solidFill>
+                  <a:srgbClr val="22282E"/>
+                </a:solidFill>
+              </a:rPr>
+              <a:t>•  SNMP con comunidad por defecto:</a:t>
+            </a:r>
+          </a:p>
+          <a:p>
+            <a:pPr>
+              <a:spcAft>
+                <a:spcPts val="600"/>
+              </a:spcAft>
+            </a:pPr>
+            <a:r>
+              <a:rPr sz="1500">
+                <a:solidFill>
+                  <a:srgbClr val="22282E"/>
+                </a:solidFill>
+              </a:rPr>
+              <a:t>•  Enumeración de usuarios por SMTP:</a:t>
+            </a:r>
+          </a:p>
+          <a:p>
+            <a:pPr>
+              <a:spcAft>
+                <a:spcPts val="600"/>
+              </a:spcAft>
+            </a:pPr>
+            <a:r>
+              <a:rPr sz="1500">
+                <a:solidFill>
+                  <a:srgbClr val="22282E"/>
+                </a:solidFill>
+              </a:rPr>
+              <a:t>•  Consulta LDAP anónima:</a:t>
             </a:r>
           </a:p>
         </p:txBody>
